--- a/assets/powerpoints/module-logement/B3-reprendre-sans-repeter.pptx
+++ b/assets/powerpoints/module-logement/B3-reprendre-sans-repeter.pptx
@@ -4649,7 +4649,7 @@
                 </a:solidFill>
                 <a:latin typeface="Verdana"/>
               </a:rPr>
-              <a:t>SÉANCE B3  ·  MODULE 8</a:t>
+              <a:t>SÉANCE B3  ·  MODULE 9</a:t>
             </a:r>
           </a:p>
         </p:txBody>

--- a/assets/powerpoints/module-logement/B3-reprendre-sans-repeter.pptx
+++ b/assets/powerpoints/module-logement/B3-reprendre-sans-repeter.pptx
@@ -12773,7 +12773,7 @@
                 </a:solidFill>
                 <a:latin typeface="Verdana"/>
               </a:rPr>
-              <a:t>EN APPRENDRE PLUS</a:t>
+              <a:t>OUVRIR LA MINI-LEÇON</a:t>
             </a:r>
           </a:p>
         </p:txBody>
